--- a/docs/DaoTao/Buoi05_ThemDanhMuc.pptx
+++ b/docs/DaoTao/Buoi05_ThemDanhMuc.pptx
@@ -595,7 +595,7 @@
           </a:p>
           <a:p>
             <a:r>
-              <a:t>- Biết bộ file của một danh mục và thuộc tính field chính</a:t>
+              <a:t>- Biết bộ file của một danh mục và các thuộc tính chính của field</a:t>
             </a:r>
           </a:p>
           <a:p>
@@ -710,22 +710,22 @@
           <a:lstStyle/>
           <a:p>
             <a:r>
-              <a:t>Một danh mục gồm: bảng SQL (thêm bảng chi tiết nếu có), trang Main\x.aspx, Grid (danh sách), Dir (form thêm sửa), Lookup (tra cứu từ màn khác), Filter ...Import và mẫu Templates\Upload nếu cho import Excel, cuối cùng là menu trong wcommand + command.</a:t>
-            </a:r>
-          </a:p>
-          <a:p>
-            <a:r>
-              <a:t>Thuộc tính chính của field: isPrimaryKey, allowNulls="false" để bắt buộc nhập, dataFormatString @upperCaseFormat để in hoa, header v/e cho nhãn, external cho field không có trong bảng (ví dụ tên tra cứu), readOnly, hidden, categoryIndex là tab của form.</a:t>
-            </a:r>
-          </a:p>
-          <a:p>
-            <a:r>
-              <a:t>Commands theo sự kiện: Declare (thông báo lỗi theo ngôn ngữ), Loading/Closing (gắn hàm JS), Inserting (kiểm tra trùng mã, gán datetime0/user_id0), Updating (kiểm tra bản ghi còn tồn tại theo $ma.OldValue), Updated (cập nhật datetime2/user_id2), Deleting (kiểm tra đã phát sinh), Checking (JS phía client).</a:t>
-            </a:r>
-          </a:p>
-          <a:p>
-            <a:r>
-              <a:t>Mẫu đầy đủ trong Bcode: Templates\fileSource\CreateList.</a:t>
+              <a:t>Một danh mục gồm: bảng SQL (thêm bảng chi tiết nếu có), trang Main\x.aspx, Grid (lưới danh sách), Dir (form thêm / sửa), Lookup (tra cứu mã từ màn hình khác), Filter ...Import và mẫu Templates\Upload nếu cho phép import Excel, cuối cùng là menu trong hai bảng wcommand và command.</a:t>
+            </a:r>
+          </a:p>
+          <a:p>
+            <a:r>
+              <a:t>Thuộc tính chính của field: isPrimaryKey là khoá; allowNulls="false" để bắt buộc nhập; dataFormatString="@upperCaseFormat" để tự viết hoa; header v/e cho nhãn tiếng Việt / tiếng Anh; external cho field không có trong bảng (ví dụ ô hiện tên tra cứu); readOnly là chỉ đọc; hidden là ẩn; categoryIndex là tab của form chứa field.</a:t>
+            </a:r>
+          </a:p>
+          <a:p>
+            <a:r>
+              <a:t>Các command theo sự kiện: Declare (khai thông báo lỗi theo ngôn ngữ), Loading / Closing (gắn hàm JavaScript), Inserting (kiểm tra trùng mã, gán datetime0 / user_id0), Updating (kiểm tra bản ghi còn tồn tại theo $ma.OldValue), Updated (cập nhật datetime2 / user_id2), Deleting (kiểm tra mã đã phát sinh dữ liệu chưa), Checking (JavaScript kiểm tra phía trình duyệt).</a:t>
+            </a:r>
+          </a:p>
+          <a:p>
+            <a:r>
+              <a:t>Mẫu đầy đủ có trong Bcode: Templates\fileSource\CreateList.</a:t>
             </a:r>
           </a:p>
         </p:txBody>
@@ -795,47 +795,47 @@
           <a:lstStyle/>
           <a:p>
             <a:r>
-              <a:t>Ví dụ thật ở Dir\Customer.f — field tài khoản ngầm định của khách hàng.</a:t>
-            </a:r>
-          </a:p>
-          <a:p>
-            <a:r>
-              <a:t>controller: Lookup dùng để tra (Lookup\Account.xml).</a:t>
-            </a:r>
-          </a:p>
-          <a:p>
-            <a:r>
-              <a:t>reference: field external trên form nhận tên sau khi chọn mã.</a:t>
-            </a:r>
-          </a:p>
-          <a:p>
-            <a:r>
-              <a:t>key: điều kiện lọc danh sách gợi ý — chỉ tài khoản chi tiết còn dùng.</a:t>
-            </a:r>
-          </a:p>
-          <a:p>
-            <a:r>
-              <a:t>check: điều kiện kiểm tra mã nhập tay.</a:t>
-            </a:r>
-          </a:p>
-          <a:p>
-            <a:r>
-              <a:t>information: khi mở bản ghi, lấy tên theo dạng field$bảng.cột_tên.</a:t>
-            </a:r>
-          </a:p>
-          <a:p>
-            <a:r>
-              <a:t>%l: Fast thay theo ngôn ngữ đăng nhập.</a:t>
-            </a:r>
-          </a:p>
-          <a:p>
-            <a:r>
-              <a:t>Quy tắc đặt tên: cột tra cứu dùng đúng tên cột mã của danh mục nguồn (ma_kh, ma_vt, ma_kho, tk...) và cùng kiểu, cùng độ dài.</a:t>
-            </a:r>
-          </a:p>
-          <a:p>
-            <a:r>
-              <a:t>Ý nghĩa chi tiết của %l và new="Default" mô tả theo cách dùng; khi cần chắc chắn thì đối chiếu một danh mục chuẩn ở dự án.</a:t>
+              <a:t>Ví dụ thật lấy từ Dir\Customer.f — field tài khoản ngầm định của khách hàng.</a:t>
+            </a:r>
+          </a:p>
+          <a:p>
+            <a:r>
+              <a:t>controller: tên Lookup dùng để tra cứu (ở đây là Lookup\Account.xml).</a:t>
+            </a:r>
+          </a:p>
+          <a:p>
+            <a:r>
+              <a:t>reference: field external trên form, nhận tên tài khoản sau khi người dùng chọn mã.</a:t>
+            </a:r>
+          </a:p>
+          <a:p>
+            <a:r>
+              <a:t>key: điều kiện lọc danh sách gợi ý — ở đây chỉ lấy tài khoản chi tiết còn dùng.</a:t>
+            </a:r>
+          </a:p>
+          <a:p>
+            <a:r>
+              <a:t>check: điều kiện kiểm tra khi người dùng gõ mã bằng tay.</a:t>
+            </a:r>
+          </a:p>
+          <a:p>
+            <a:r>
+              <a:t>information: khi mở một bản ghi có sẵn, Fast lấy tên theo dạng field$bảng.cột_tên.</a:t>
+            </a:r>
+          </a:p>
+          <a:p>
+            <a:r>
+              <a:t>%l: Fast thay theo ngôn ngữ đăng nhập, để lấy tên đúng ngôn ngữ người dùng đang dùng.</a:t>
+            </a:r>
+          </a:p>
+          <a:p>
+            <a:r>
+              <a:t>Quy tắc đặt tên: cột tra cứu dùng đúng tên cột mã của danh mục nguồn (ma_kh, ma_vt, ma_kho, tk...) và cùng kiểu, cùng độ dài với cột đó.</a:t>
+            </a:r>
+          </a:p>
+          <a:p>
+            <a:r>
+              <a:t>Ý nghĩa chi tiết của %l và new="Default" ở đây được mô tả theo cách dùng quan sát được; khi cần chắc chắn thì đối chiếu với một danh mục chuẩn ở dự án.</a:t>
             </a:r>
           </a:p>
         </p:txBody>
@@ -905,37 +905,37 @@
           <a:lstStyle/>
           <a:p>
             <a:r>
-              <a:t>Menu Tool mở rộng → Tạo nhanh danh mục (cần key bản quyền). Bcode sinh đủ bộ file danh mục từ mẫu CreateList.</a:t>
-            </a:r>
-          </a:p>
-          <a:p>
-            <a:r>
-              <a:t>Có 3 cách điền tự động từ nội dung yêu cầu, mở từ Note (New) hoặc khung chi tiết của Báo cáo yêu cầu FSG:</a:t>
-            </a:r>
-          </a:p>
-          <a:p>
-            <a:r>
-              <a:t>1. Theo luật Fast — nhanh, không AI, không cần key.</a:t>
-            </a:r>
-          </a:p>
-          <a:p>
-            <a:r>
-              <a:t>2. AI phân tích — AI chỉ viết lại yêu cầu theo đúng mẫu câu chuẩn; bạn đọc, sửa, xác nhận (Ctrl+Enter); sau đó luật Fast tạo danh mục. Cách này cân bằng: AI hiểu câu văn, luật đảm bảo kết quả đúng chuẩn.</a:t>
-            </a:r>
-          </a:p>
-          <a:p>
-            <a:r>
-              <a:t>3. AI tạo danh mục — AI điền thẳng; Bcode chỉ gửi tên bảng / cột / kiểu, không gửi dữ liệu dòng.</a:t>
-            </a:r>
-          </a:p>
-          <a:p>
-            <a:r>
-              <a:t>Dù cách nào, Bcode không tự ghi file hay chạy SQL: bạn xem lại, Xem XML, Tạo file, rồi Tạo menu.</a:t>
-            </a:r>
-          </a:p>
-          <a:p>
-            <a:r>
-              <a:t>Gõ tên bảng chưa có (zdm...) là tạo bảng mới — script ở tab Script, Bcode không tự chạy.</a:t>
+              <a:t>Mở từ menu Tool mở rộng → Tạo nhanh danh mục (cần key bản quyền). Bcode sinh đủ bộ file của danh mục dựa trên mẫu CreateList.</a:t>
+            </a:r>
+          </a:p>
+          <a:p>
+            <a:r>
+              <a:t>Có 3 cách điền tự động từ nội dung yêu cầu; mở từ Note (New) hoặc từ khung chi tiết của Báo cáo yêu cầu FSG:</a:t>
+            </a:r>
+          </a:p>
+          <a:p>
+            <a:r>
+              <a:t>1. Theo luật Fast — nhanh, không dùng AI, không cần API key.</a:t>
+            </a:r>
+          </a:p>
+          <a:p>
+            <a:r>
+              <a:t>2. AI phân tích — AI chỉ viết lại yêu cầu theo đúng mẫu câu chuẩn; bạn đọc, sửa, rồi xác nhận (Ctrl+Enter); sau đó luật Fast tạo danh mục từ nội dung đã xác nhận. Cách này cân bằng: AI giúp hiểu câu văn tự do, còn luật bảo đảm kết quả đúng chuẩn.</a:t>
+            </a:r>
+          </a:p>
+          <a:p>
+            <a:r>
+              <a:t>3. AI tạo danh mục — AI điền thẳng vào form; Bcode chỉ gửi cho AI tên bảng, tên cột, kiểu cột, không gửi dữ liệu các dòng.</a:t>
+            </a:r>
+          </a:p>
+          <a:p>
+            <a:r>
+              <a:t>Dù dùng cách nào, Bcode cũng không tự ghi file hay tự chạy SQL: bạn xem lại, bấm Xem XML, Tạo file, rồi Tạo menu.</a:t>
+            </a:r>
+          </a:p>
+          <a:p>
+            <a:r>
+              <a:t>Nếu gõ tên một bảng chưa có (zdm...) thì Bcode hiểu là tạo bảng mới — script tạo bảng nằm ở tab Script, Bcode không tự chạy script này.</a:t>
             </a:r>
           </a:p>
         </p:txBody>
@@ -1005,22 +1005,22 @@
           <a:lstStyle/>
           <a:p>
             <a:r>
-              <a:t>Đây là mẫu câu luật Fast đọc chuẩn nhất, cũng là mẫu mà AI phân tích viết ra. Mỗi dòng gạch đầu dòng là một cột; [field] hoặc [field kiểu] chốt tên field; cụm "lookup từ danh mục X", "bắt buộc nhập" được hiểu.</a:t>
-            </a:r>
-          </a:p>
-          <a:p>
-            <a:r>
-              <a:t>Kiểu tự chọn: tiền / số lượng / giá numeric(19,4), năm int, ngày smalldatetime, cột lookup lấy đúng kiểu cột mã nguồn. Tháng / năm luôn tách cột int riêng.</a:t>
-            </a:r>
-          </a:p>
-          <a:p>
-            <a:r>
-              <a:t>Luật nhớ field bạn đã sửa (tiêu đề → field) và học field từ source dự án (đọc các file Dir của Source Path).</a:t>
-            </a:r>
-          </a:p>
-          <a:p>
-            <a:r>
-              <a:t>Nút ⚡ Chuẩn Fast ở thanh dưới: soát thiếu cột hệ thống, đặt tên mã / tên, kiểu cột tra cứu, type không khớp kiểu SQL, thiếu tiêu đề Anh, controller trùng, khoá chi tiết. Có mục dễ lỗi thì Tạo file sẽ hỏi lại.</a:t>
+              <a:t>Đây là mẫu câu mà luật Fast đọc chính xác nhất, cũng chính là dạng mà chế độ AI phân tích viết ra. Mỗi dòng gạch đầu dòng là một cột; [field] hoặc [field kiểu] dùng để chốt tên field (và kiểu); các cụm như "lookup từ danh mục X", "bắt buộc nhập" đều được luật hiểu.</a:t>
+            </a:r>
+          </a:p>
+          <a:p>
+            <a:r>
+              <a:t>Kiểu cột được tự chọn: tiền, số lượng, giá là numeric(19,4); năm là int; ngày là smalldatetime; cột lookup lấy đúng kiểu của cột mã nguồn. Tháng và năm luôn được tách thành cột int riêng.</a:t>
+            </a:r>
+          </a:p>
+          <a:p>
+            <a:r>
+              <a:t>Luật nhớ những field bạn đã sửa (tiêu đề nào ứng với field nào) và học tên field từ source của dự án (đọc các file Dir trong Source Path).</a:t>
+            </a:r>
+          </a:p>
+          <a:p>
+            <a:r>
+              <a:t>Nút ⚡ Chuẩn Fast ở thanh dưới cùng kiểm tra: thiếu cột hệ thống, cách đặt tên cột mã / cột tên, kiểu cột tra cứu, type của field không khớp kiểu SQL, thiếu tiêu đề tiếng Anh, trùng tên controller, khoá của bảng chi tiết. Nếu còn mục dễ gây lỗi thì khi bấm Tạo file Bcode sẽ hỏi lại.</a:t>
             </a:r>
           </a:p>
         </p:txBody>
@@ -1090,7 +1090,7 @@
           <a:lstStyle/>
           <a:p>
             <a:r>
-              <a:t>Đọc qua checklist trước khi coi danh mục là xong. Mục 1–2 về bảng; 3 về kiểm tra tự động; 4–6 thử trên web; 7 menu và gói.</a:t>
+              <a:t>Đọc qua checklist này trước khi coi một danh mục là xong. Mục 1 và 2 kiểm tra bảng; mục 3 là kiểm tra tự động bằng công cụ (⚡ Chuẩn Fast và bảng Problems của BcodeViewer); mục 4 đến 6 là thử trực tiếp trên web; mục 7 là menu, phân quyền và gói update.</a:t>
             </a:r>
           </a:p>
         </p:txBody>
@@ -1165,7 +1165,7 @@
           </a:p>
           <a:p>
             <a:r>
-              <a:t>Bài tập về nhà: Nhận 1 yêu cầu “thêm danh mục” thật (đã cũ) từ người hướng dẫn, làm trọn trên dự án thử đến khi qua checklist 5.5.</a:t>
+              <a:t>Bài tập về nhà: Nhận 1 yêu cầu “thêm danh mục” thật (đã cũ) từ người hướng dẫn, làm trọn trên dự án thử cho đến khi đạt hết checklist ở mục 5.5.</a:t>
             </a:r>
           </a:p>
         </p:txBody>
@@ -1240,22 +1240,22 @@
           </a:p>
           <a:p>
             <a:r>
-              <a:t>1. Cùng tên, cùng kiểu và độ dài với dmkh.ma_kh.</a:t>
-            </a:r>
-          </a:p>
-          <a:p>
-            <a:r>
-              <a:t>2. Lấy tên: field tk ghép bảng dmtk, cột ten_tk theo ngôn ngữ.</a:t>
-            </a:r>
-          </a:p>
-          <a:p>
-            <a:r>
-              <a:t>3. AI phân tích chỉ viết lại yêu cầu theo mẫu, bạn xác nhận rồi luật Fast tạo; AI tạo danh mục điền thẳng.</a:t>
-            </a:r>
-          </a:p>
-          <a:p>
-            <a:r>
-              <a:t>4. Không — script ở tab Script, phải tự xem lại rồi chạy.</a:t>
+              <a:t>1. Cùng tên, cùng kiểu và cùng độ dài với dmkh.ma_kh.</a:t>
+            </a:r>
+          </a:p>
+          <a:p>
+            <a:r>
+              <a:t>2. Hiện tên: field tk ghép với bảng dmtk, lấy cột ten_tk theo ngôn ngữ đang dùng.</a:t>
+            </a:r>
+          </a:p>
+          <a:p>
+            <a:r>
+              <a:t>3. AI phân tích chỉ viết lại yêu cầu theo mẫu, bạn xác nhận rồi luật Fast mới tạo; AI tạo danh mục thì tự điền luôn.</a:t>
+            </a:r>
+          </a:p>
+          <a:p>
+            <a:r>
+              <a:t>4. Không. Script nằm ở tab Script; bạn phải tự xem lại rồi chạy.</a:t>
             </a:r>
           </a:p>
         </p:txBody>
@@ -4814,7 +4814,7 @@
                 <a:ea typeface="Segoe UI"/>
                 <a:cs typeface="Segoe UI"/>
               </a:rPr>
-              <a:t>Biết bộ file của một danh mục và thuộc tính field chính</a:t>
+              <a:t>Biết bộ file của một danh mục và các thuộc tính chính của field</a:t>
             </a:r>
           </a:p>
           <a:p>
@@ -6197,7 +6197,7 @@
                 <a:ea typeface="Segoe UI"/>
                 <a:cs typeface="Segoe UI"/>
               </a:rPr>
-              <a:t>danh sách</a:t>
+              <a:t>lưới danh sách</a:t>
             </a:r>
           </a:p>
         </p:txBody>
@@ -6523,7 +6523,7 @@
                 <a:ea typeface="Segoe UI"/>
                 <a:cs typeface="Segoe UI"/>
               </a:rPr>
-              <a:t>tra cứu</a:t>
+              <a:t>tra cứu mã</a:t>
             </a:r>
           </a:p>
         </p:txBody>
@@ -6802,7 +6802,7 @@
                           <a:ea typeface="Segoe UI"/>
                           <a:cs typeface="Segoe UI"/>
                         </a:rPr>
-                        <a:t>Bảng, cột khoá, sắp xếp mặc định</a:t>
+                        <a:t>Bảng, cột khoá, thứ tự sắp xếp mặc định</a:t>
                       </a:r>
                     </a:p>
                   </a:txBody>
@@ -6874,7 +6874,7 @@
                           <a:ea typeface="Segoe UI"/>
                           <a:cs typeface="Segoe UI"/>
                         </a:rPr>
-                        <a:t>Là khoá · bắt buộc nhập</a:t>
+                        <a:t>Là khoá chính · bắt buộc nhập</a:t>
                       </a:r>
                     </a:p>
                   </a:txBody>
@@ -6924,7 +6924,7 @@
                           <a:ea typeface="Segoe UI"/>
                           <a:cs typeface="Segoe UI"/>
                         </a:rPr>
-                        <a:t>Tự in hoa mã</a:t>
+                        <a:t>Tự viết hoa mã</a:t>
                       </a:r>
                     </a:p>
                   </a:txBody>
@@ -7129,7 +7129,7 @@
                           <a:ea typeface="Segoe UI"/>
                           <a:cs typeface="Segoe UI"/>
                         </a:rPr>
-                        <a:t>SQL kiểm tra / ghi theo sự kiện</a:t>
+                        <a:t>SQL kiểm tra / ghi dữ liệu theo sự kiện</a:t>
                       </a:r>
                     </a:p>
                   </a:txBody>
@@ -7887,7 +7887,7 @@
                 <a:ea typeface="Segoe UI"/>
                 <a:cs typeface="Segoe UI"/>
               </a:rPr>
-              <a:t> — lọc gợi ý</a:t>
+              <a:t> — lọc danh sách gợi ý</a:t>
             </a:r>
           </a:p>
           <a:p>
@@ -7927,7 +7927,7 @@
                 <a:ea typeface="Segoe UI"/>
                 <a:cs typeface="Segoe UI"/>
               </a:rPr>
-              <a:t> — kiểm mã nhập tay</a:t>
+              <a:t> — kiểm tra mã gõ tay</a:t>
             </a:r>
           </a:p>
           <a:p>
@@ -8069,7 +8069,7 @@
                 <a:ea typeface="Segoe UI"/>
                 <a:cs typeface="Segoe UI"/>
               </a:rPr>
-              <a:t> cột mã nguồn</a:t>
+              <a:t> với cột mã nguồn</a:t>
             </a:r>
           </a:p>
         </p:txBody>
@@ -8805,7 +8805,7 @@
                 <a:ea typeface="Segoe UI"/>
                 <a:cs typeface="Segoe UI"/>
               </a:rPr>
-              <a:t> yêu cầu theo mẫu chuẩn</a:t>
+              <a:t> yêu cầu theo mẫu câu chuẩn</a:t>
             </a:r>
           </a:p>
           <a:p>
@@ -8834,7 +8834,7 @@
                 <a:ea typeface="Segoe UI"/>
                 <a:cs typeface="Segoe UI"/>
               </a:rPr>
-              <a:t>Bạn sửa / </a:t>
+              <a:t>Bạn sửa rồi </a:t>
             </a:r>
             <a:r>
               <a:rPr sz="1600" b="1" i="0">
@@ -8874,7 +8874,7 @@
                 <a:ea typeface="Segoe UI"/>
                 <a:cs typeface="Segoe UI"/>
               </a:rPr>
-              <a:t>Luật Fast tạo từ nội dung đó</a:t>
+              <a:t>Luật Fast tạo danh mục từ đó</a:t>
             </a:r>
           </a:p>
         </p:txBody>
@@ -9084,7 +9084,7 @@
                 <a:ea typeface="Segoe UI"/>
                 <a:cs typeface="Segoe UI"/>
               </a:rPr>
-              <a:t>AI đọc yêu cầu + tên bảng / cột App Data</a:t>
+              <a:t>AI đọc yêu cầu + tên bảng, cột App Data</a:t>
             </a:r>
           </a:p>
           <a:p>
@@ -9113,7 +9113,7 @@
                 <a:ea typeface="Segoe UI"/>
                 <a:cs typeface="Segoe UI"/>
               </a:rPr>
-              <a:t>Điền thẳng, hỏi lại điều chưa rõ</a:t>
+              <a:t>Điền thẳng, hỏi lại chỗ chưa rõ</a:t>
             </a:r>
           </a:p>
           <a:p>
@@ -9304,7 +9304,7 @@
                 <a:ea typeface="Segoe UI"/>
                 <a:cs typeface="Segoe UI"/>
               </a:rPr>
-              <a:t> có </a:t>
+              <a:t> có sẵn </a:t>
             </a:r>
             <a:r>
               <a:rPr sz="1300" b="0" i="0">
@@ -9348,7 +9348,7 @@
                 <a:ea typeface="Segoe UI"/>
                 <a:cs typeface="Segoe UI"/>
               </a:rPr>
-              <a:t>, xem lại rồi chạy. Sau đó </a:t>
+              <a:t>, bạn xem lại rồi chạy. Sau đó </a:t>
             </a:r>
             <a:r>
               <a:rPr sz="1400" b="1" i="0">
@@ -9974,7 +9974,7 @@
                 <a:ea typeface="Segoe UI"/>
                 <a:cs typeface="Segoe UI"/>
               </a:rPr>
-              <a:t> = một cột</a:t>
+              <a:t> là một cột</a:t>
             </a:r>
           </a:p>
           <a:p>
@@ -10043,7 +10043,7 @@
                 <a:ea typeface="Segoe UI"/>
                 <a:cs typeface="Segoe UI"/>
               </a:rPr>
-              <a:t>Tiền / SL → </a:t>
+              <a:t>Tiền, số lượng → </a:t>
             </a:r>
             <a:r>
               <a:rPr sz="1400" b="0" i="0">
@@ -10156,7 +10156,7 @@
                 <a:ea typeface="Segoe UI"/>
                 <a:cs typeface="Segoe UI"/>
               </a:rPr>
-              <a:t> field bạn sửa</a:t>
+              <a:t> field bạn đã sửa</a:t>
             </a:r>
           </a:p>
           <a:p>
@@ -10196,7 +10196,7 @@
                 <a:ea typeface="Segoe UI"/>
                 <a:cs typeface="Segoe UI"/>
               </a:rPr>
-              <a:t>: thiếu cột hệ thống, sai kiểu lookup, thiếu tiêu đề e…</a:t>
+              <a:t>: thiếu cột hệ thống, sai kiểu lookup, thiếu tiêu đề tiếng Anh…</a:t>
             </a:r>
           </a:p>
         </p:txBody>
@@ -10537,7 +10537,7 @@
                           <a:ea typeface="Segoe UI"/>
                           <a:cs typeface="Segoe UI"/>
                         </a:rPr>
-                        <a:t>Bảng đúng kiểu; có khoá chính, </a:t>
+                        <a:t>Bảng đúng kiểu cột; có khoá chính, </a:t>
                       </a:r>
                       <a:r>
                         <a:rPr sz="1500" b="0" i="0">
@@ -10642,7 +10642,7 @@
                           <a:ea typeface="Segoe UI"/>
                           <a:cs typeface="Segoe UI"/>
                         </a:rPr>
-                        <a:t>Cột tra cứu cùng kiểu / độ dài cột mã nguồn</a:t>
+                        <a:t>Cột tra cứu cùng kiểu và cùng độ dài với cột mã nguồn</a:t>
                       </a:r>
                     </a:p>
                   </a:txBody>
@@ -10703,7 +10703,7 @@
                           <a:ea typeface="Segoe UI"/>
                           <a:cs typeface="Segoe UI"/>
                         </a:rPr>
-                        <a:t> không còn mục dễ lỗi; </a:t>
+                        <a:t> không còn mục dễ lỗi; bảng </a:t>
                       </a:r>
                       <a:r>
                         <a:rPr sz="1600" b="1" i="0">
@@ -10725,7 +10725,7 @@
                           <a:ea typeface="Segoe UI"/>
                           <a:cs typeface="Segoe UI"/>
                         </a:rPr>
-                        <a:t> của Viewer sạch</a:t>
+                        <a:t> của Viewer sạch lỗi</a:t>
                       </a:r>
                     </a:p>
                   </a:txBody>
@@ -10775,7 +10775,7 @@
                           <a:ea typeface="Segoe UI"/>
                           <a:cs typeface="Segoe UI"/>
                         </a:rPr>
-                        <a:t>Thêm / sửa / xoá / tìm / tra cứu chạy được; mã trùng bị chặn</a:t>
+                        <a:t>Thêm / sửa / xoá / tìm / tra cứu đều chạy được; nhập mã trùng bị chặn</a:t>
                       </a:r>
                     </a:p>
                   </a:txBody>
@@ -10825,7 +10825,7 @@
                           <a:ea typeface="Segoe UI"/>
                           <a:cs typeface="Segoe UI"/>
                         </a:rPr>
-                        <a:t>Tiêu đề tiếng Anh đủ (đăng nhập tiếng Anh xem thử)</a:t>
+                        <a:t>Đủ tiêu đề tiếng Anh (đăng nhập bằng tiếng Anh để xem thử)</a:t>
                       </a:r>
                     </a:p>
                   </a:txBody>
@@ -10875,7 +10875,7 @@
                           <a:ea typeface="Segoe UI"/>
                           <a:cs typeface="Segoe UI"/>
                         </a:rPr>
-                        <a:t>Import Excel (nếu có): tải mẫu, nhập thử, nhập lỗi có báo</a:t>
+                        <a:t>Import Excel (nếu có): tải mẫu, nhập thử, nhập sai thì có báo lỗi</a:t>
                       </a:r>
                     </a:p>
                   </a:txBody>
@@ -10925,7 +10925,7 @@
                           <a:ea typeface="Segoe UI"/>
                           <a:cs typeface="Segoe UI"/>
                         </a:rPr>
-                        <a:t>Menu + phân quyền; script menu đã vào gói</a:t>
+                        <a:t>Có menu và phân quyền; script menu đã đưa vào gói update</a:t>
                       </a:r>
                     </a:p>
                   </a:txBody>
@@ -11285,7 +11285,7 @@
                 <a:ea typeface="Segoe UI"/>
                 <a:cs typeface="Segoe UI"/>
               </a:rPr>
-              <a:t> Tạo lại bằng Tạo nhanh danh mục từ nội dung yêu cầu viết theo mẫu; so sánh file.</a:t>
+              <a:t> Tạo lại danh mục đó bằng Tạo nhanh danh mục, từ nội dung yêu cầu viết theo mẫu; so sánh các file sinh ra với bản làm tay.</a:t>
             </a:r>
           </a:p>
           <a:p>
@@ -11325,7 +11325,7 @@
                 <a:ea typeface="Segoe UI"/>
                 <a:cs typeface="Segoe UI"/>
               </a:rPr>
-              <a:t> Tạo menu, phân quyền, thử thêm / sửa / xoá / tra cứu trên web.</a:t>
+              <a:t> Tạo menu, phân quyền, rồi thử thêm / sửa / xoá / tra cứu trên web.</a:t>
             </a:r>
           </a:p>
         </p:txBody>
@@ -11671,7 +11671,7 @@
                 <a:ea typeface="Segoe UI"/>
                 <a:cs typeface="Segoe UI"/>
               </a:rPr>
-              <a:t> Nhận 1 yêu cầu “thêm danh mục” thật (đã cũ) từ người hướng dẫn, làm trọn trên dự án thử đến khi qua checklist 5.5.</a:t>
+              <a:t> Nhận 1 yêu cầu “thêm danh mục” thật (đã cũ) từ người hướng dẫn, làm trọn trên dự án thử cho đến khi đạt hết checklist ở mục 5.5.</a:t>
             </a:r>
           </a:p>
         </p:txBody>
